--- a/generated/Tier 1 Broker Scorecards/Jagdeep Singh Insurance Agency, Inc_Broker_Scorecard.pptx
+++ b/generated/Tier 1 Broker Scorecards/Jagdeep Singh Insurance Agency, Inc_Broker_Scorecard.pptx
@@ -3357,7 +3357,7 @@
                         <a:rPr sz="800">
                           <a:latin typeface="Segoe UI"/>
                         </a:rPr>
-                        <a:t>$12,058,763.07 / $10,714,256.70 / $2,705,065.19</a:t>
+                        <a:t>$12,058,763.07 / $10,724,858.42 / $2,715,666.91</a:t>
                       </a:r>
                     </a:p>
                   </a:txBody>
@@ -3394,7 +3394,7 @@
                         <a:rPr sz="900">
                           <a:latin typeface="Segoe UI"/>
                         </a:rPr>
-                        <a:t>Tier 1  |  6.48% / 15.00%</a:t>
+                        <a:t>Tier 1  |  6.50% / 15.00%</a:t>
                       </a:r>
                     </a:p>
                   </a:txBody>
@@ -3431,7 +3431,7 @@
                         <a:rPr sz="900">
                           <a:latin typeface="Segoe UI"/>
                         </a:rPr>
-                        <a:t>$16,882,268.30  (16.0% achieved)</a:t>
+                        <a:t>$16,882,268.30  (16.1% achieved)</a:t>
                       </a:r>
                     </a:p>
                   </a:txBody>
@@ -3653,7 +3653,7 @@
                         <a:rPr sz="900">
                           <a:latin typeface="Segoe UI"/>
                         </a:rPr>
-                        <a:t>Fleet Subs: 204  |  Binds: 20</a:t>
+                        <a:t>Fleet Subs: 206  |  Binds: 21</a:t>
                       </a:r>
                     </a:p>
                   </a:txBody>
@@ -3690,7 +3690,7 @@
                         <a:rPr sz="900">
                           <a:latin typeface="Segoe UI"/>
                         </a:rPr>
-                        <a:t>Fleet Bound Premium: $1,653,540.78</a:t>
+                        <a:t>Fleet Bound Premium: $1,712,551.83</a:t>
                       </a:r>
                     </a:p>
                   </a:txBody>
@@ -3727,7 +3727,7 @@
                         <a:rPr sz="900">
                           <a:latin typeface="Segoe UI"/>
                         </a:rPr>
-                        <a:t>Fleet Book %: 61.1%</a:t>
+                        <a:t>Fleet Book %: 63.1%</a:t>
                       </a:r>
                     </a:p>
                   </a:txBody>
@@ -3766,7 +3766,7 @@
                         <a:rPr sz="900">
                           <a:latin typeface="Segoe UI"/>
                         </a:rPr>
-                        <a:t>Non-Fleet Subs: 1015  |  Binds: 59</a:t>
+                        <a:t>Non-Fleet Subs: 1025  |  Binds: 59</a:t>
                       </a:r>
                     </a:p>
                   </a:txBody>
@@ -3803,7 +3803,7 @@
                         <a:rPr sz="900">
                           <a:latin typeface="Segoe UI"/>
                         </a:rPr>
-                        <a:t>Non-Fleet Bound Premium: $1,051,524.41</a:t>
+                        <a:t>Non-Fleet Bound Premium: $1,003,115.08</a:t>
                       </a:r>
                     </a:p>
                   </a:txBody>
@@ -3840,7 +3840,7 @@
                         <a:rPr sz="900">
                           <a:latin typeface="Segoe UI"/>
                         </a:rPr>
-                        <a:t>Non-Fleet Book %: 38.9%</a:t>
+                        <a:t>Non-Fleet Book %: 36.9%</a:t>
                       </a:r>
                     </a:p>
                   </a:txBody>
@@ -4428,7 +4428,7 @@
                           </a:solidFill>
                           <a:latin typeface="Segoe UI"/>
                         </a:rPr>
-                        <a:t>165</a:t>
+                        <a:t>178</a:t>
                       </a:r>
                     </a:p>
                   </a:txBody>
@@ -4664,7 +4664,7 @@
                         <a:rPr sz="800">
                           <a:latin typeface="Segoe UI"/>
                         </a:rPr>
-                        <a:t>20.1%</a:t>
+                        <a:t>20.4%</a:t>
                       </a:r>
                     </a:p>
                   </a:txBody>
@@ -4707,7 +4707,7 @@
                           </a:solidFill>
                           <a:latin typeface="Segoe UI"/>
                         </a:rPr>
-                        <a:t>9.1%</a:t>
+                        <a:t>9.0%</a:t>
                       </a:r>
                     </a:p>
                   </a:txBody>
@@ -4747,7 +4747,7 @@
                         <a:rPr sz="800">
                           <a:latin typeface="Segoe UI"/>
                         </a:rPr>
-                        <a:t>23.6%</a:t>
+                        <a:t>23.3%</a:t>
                       </a:r>
                     </a:p>
                   </a:txBody>
@@ -4943,7 +4943,7 @@
                         <a:rPr sz="800">
                           <a:latin typeface="Segoe UI"/>
                         </a:rPr>
-                        <a:t>74</a:t>
+                        <a:t>75</a:t>
                       </a:r>
                     </a:p>
                   </a:txBody>
@@ -4983,7 +4983,7 @@
                           </a:solidFill>
                           <a:latin typeface="Segoe UI"/>
                         </a:rPr>
-                        <a:t>15</a:t>
+                        <a:t>16</a:t>
                       </a:r>
                     </a:p>
                   </a:txBody>
@@ -5020,7 +5020,7 @@
                         <a:rPr sz="800">
                           <a:latin typeface="Segoe UI"/>
                         </a:rPr>
-                        <a:t>83</a:t>
+                        <a:t>82</a:t>
                       </a:r>
                     </a:p>
                   </a:txBody>
@@ -5262,7 +5262,7 @@
                           </a:solidFill>
                           <a:latin typeface="Segoe UI"/>
                         </a:rPr>
-                        <a:t>$574.2K</a:t>
+                        <a:t>$584.8K</a:t>
                       </a:r>
                     </a:p>
                   </a:txBody>

--- a/generated/Tier 1 Broker Scorecards/Jagdeep Singh Insurance Agency, Inc_Broker_Scorecard.pptx
+++ b/generated/Tier 1 Broker Scorecards/Jagdeep Singh Insurance Agency, Inc_Broker_Scorecard.pptx
@@ -3394,7 +3394,7 @@
                         <a:rPr sz="900">
                           <a:latin typeface="Segoe UI"/>
                         </a:rPr>
-                        <a:t>Tier 1  |  6.50% / 15.00%</a:t>
+                        <a:t>Tier 1  |  6.82% / 15.00%</a:t>
                       </a:r>
                     </a:p>
                   </a:txBody>
@@ -3653,7 +3653,7 @@
                         <a:rPr sz="900">
                           <a:latin typeface="Segoe UI"/>
                         </a:rPr>
-                        <a:t>Fleet Subs: 206  |  Binds: 21</a:t>
+                        <a:t>Fleet Subs: 209  |  Binds: 21</a:t>
                       </a:r>
                     </a:p>
                   </a:txBody>
@@ -3690,7 +3690,7 @@
                         <a:rPr sz="900">
                           <a:latin typeface="Segoe UI"/>
                         </a:rPr>
-                        <a:t>Fleet Bound Premium: $1,712,551.83</a:t>
+                        <a:t>Fleet Bound Premium: $1,691,420.20</a:t>
                       </a:r>
                     </a:p>
                   </a:txBody>
@@ -3727,7 +3727,7 @@
                         <a:rPr sz="900">
                           <a:latin typeface="Segoe UI"/>
                         </a:rPr>
-                        <a:t>Fleet Book %: 63.1%</a:t>
+                        <a:t>Fleet Book %: 62.3%</a:t>
                       </a:r>
                     </a:p>
                   </a:txBody>
@@ -3766,7 +3766,7 @@
                         <a:rPr sz="900">
                           <a:latin typeface="Segoe UI"/>
                         </a:rPr>
-                        <a:t>Non-Fleet Subs: 1025  |  Binds: 59</a:t>
+                        <a:t>Non-Fleet Subs: 1037  |  Binds: 64</a:t>
                       </a:r>
                     </a:p>
                   </a:txBody>
@@ -3803,7 +3803,7 @@
                         <a:rPr sz="900">
                           <a:latin typeface="Segoe UI"/>
                         </a:rPr>
-                        <a:t>Non-Fleet Bound Premium: $1,003,115.08</a:t>
+                        <a:t>Non-Fleet Bound Premium: $1,024,246.71</a:t>
                       </a:r>
                     </a:p>
                   </a:txBody>
@@ -3840,7 +3840,7 @@
                         <a:rPr sz="900">
                           <a:latin typeface="Segoe UI"/>
                         </a:rPr>
-                        <a:t>Non-Fleet Book %: 36.9%</a:t>
+                        <a:t>Non-Fleet Book %: 37.7%</a:t>
                       </a:r>
                     </a:p>
                   </a:txBody>
@@ -4311,7 +4311,7 @@
                         <a:rPr sz="800">
                           <a:latin typeface="Segoe UI"/>
                         </a:rPr>
-                        <a:t>336</a:t>
+                        <a:t>337</a:t>
                       </a:r>
                     </a:p>
                   </a:txBody>
@@ -4346,9 +4346,6 @@
                       <a:pPr algn="ctr"/>
                       <a:r>
                         <a:rPr sz="800">
-                          <a:solidFill>
-                            <a:srgbClr val="059669"/>
-                          </a:solidFill>
                           <a:latin typeface="Segoe UI"/>
                         </a:rPr>
                         <a:t>337</a:t>
@@ -4428,7 +4425,7 @@
                           </a:solidFill>
                           <a:latin typeface="Segoe UI"/>
                         </a:rPr>
-                        <a:t>178</a:t>
+                        <a:t>196</a:t>
                       </a:r>
                     </a:p>
                   </a:txBody>
@@ -4664,7 +4661,7 @@
                         <a:rPr sz="800">
                           <a:latin typeface="Segoe UI"/>
                         </a:rPr>
-                        <a:t>20.4%</a:t>
+                        <a:t>19.8%</a:t>
                       </a:r>
                     </a:p>
                   </a:txBody>
@@ -4707,7 +4704,7 @@
                           </a:solidFill>
                           <a:latin typeface="Segoe UI"/>
                         </a:rPr>
-                        <a:t>9.0%</a:t>
+                        <a:t>9.7%</a:t>
                       </a:r>
                     </a:p>
                   </a:txBody>
@@ -4747,7 +4744,7 @@
                         <a:rPr sz="800">
                           <a:latin typeface="Segoe UI"/>
                         </a:rPr>
-                        <a:t>23.3%</a:t>
+                        <a:t>23.9%</a:t>
                       </a:r>
                     </a:p>
                   </a:txBody>
@@ -4943,7 +4940,7 @@
                         <a:rPr sz="800">
                           <a:latin typeface="Segoe UI"/>
                         </a:rPr>
-                        <a:t>75</a:t>
+                        <a:t>73</a:t>
                       </a:r>
                     </a:p>
                   </a:txBody>
@@ -4983,7 +4980,7 @@
                           </a:solidFill>
                           <a:latin typeface="Segoe UI"/>
                         </a:rPr>
-                        <a:t>16</a:t>
+                        <a:t>19</a:t>
                       </a:r>
                     </a:p>
                   </a:txBody>
@@ -5020,7 +5017,7 @@
                         <a:rPr sz="800">
                           <a:latin typeface="Segoe UI"/>
                         </a:rPr>
-                        <a:t>82</a:t>
+                        <a:t>84</a:t>
                       </a:r>
                     </a:p>
                   </a:txBody>

--- a/generated/Tier 1 Broker Scorecards/Jagdeep Singh Insurance Agency, Inc_Broker_Scorecard.pptx
+++ b/generated/Tier 1 Broker Scorecards/Jagdeep Singh Insurance Agency, Inc_Broker_Scorecard.pptx
@@ -3357,7 +3357,7 @@
                         <a:rPr sz="800">
                           <a:latin typeface="Segoe UI"/>
                         </a:rPr>
-                        <a:t>$12,058,763.07 / $10,724,858.42 / $2,715,666.91</a:t>
+                        <a:t>$12,058,763.07 / $10,785,724.36 / $2,776,532.85</a:t>
                       </a:r>
                     </a:p>
                   </a:txBody>
@@ -3394,7 +3394,7 @@
                         <a:rPr sz="900">
                           <a:latin typeface="Segoe UI"/>
                         </a:rPr>
-                        <a:t>Tier 1  |  6.82% / 15.00%</a:t>
+                        <a:t>Tier 1  |  6.93% / 15.00%</a:t>
                       </a:r>
                     </a:p>
                   </a:txBody>
@@ -3431,7 +3431,7 @@
                         <a:rPr sz="900">
                           <a:latin typeface="Segoe UI"/>
                         </a:rPr>
-                        <a:t>$16,882,268.30  (16.1% achieved)</a:t>
+                        <a:t>$16,882,268.30  (16.4% achieved)</a:t>
                       </a:r>
                     </a:p>
                   </a:txBody>
@@ -3653,7 +3653,7 @@
                         <a:rPr sz="900">
                           <a:latin typeface="Segoe UI"/>
                         </a:rPr>
-                        <a:t>Fleet Subs: 209  |  Binds: 21</a:t>
+                        <a:t>Fleet Subs: 210  |  Binds: 21</a:t>
                       </a:r>
                     </a:p>
                   </a:txBody>
@@ -3690,7 +3690,7 @@
                         <a:rPr sz="900">
                           <a:latin typeface="Segoe UI"/>
                         </a:rPr>
-                        <a:t>Fleet Bound Premium: $1,691,420.20</a:t>
+                        <a:t>Fleet Bound Premium: $1,708,274.49</a:t>
                       </a:r>
                     </a:p>
                   </a:txBody>
@@ -3727,7 +3727,7 @@
                         <a:rPr sz="900">
                           <a:latin typeface="Segoe UI"/>
                         </a:rPr>
-                        <a:t>Fleet Book %: 62.3%</a:t>
+                        <a:t>Fleet Book %: 61.5%</a:t>
                       </a:r>
                     </a:p>
                   </a:txBody>
@@ -3766,7 +3766,7 @@
                         <a:rPr sz="900">
                           <a:latin typeface="Segoe UI"/>
                         </a:rPr>
-                        <a:t>Non-Fleet Subs: 1037  |  Binds: 64</a:t>
+                        <a:t>Non-Fleet Subs: 1045  |  Binds: 66</a:t>
                       </a:r>
                     </a:p>
                   </a:txBody>
@@ -3803,7 +3803,7 @@
                         <a:rPr sz="900">
                           <a:latin typeface="Segoe UI"/>
                         </a:rPr>
-                        <a:t>Non-Fleet Bound Premium: $1,024,246.71</a:t>
+                        <a:t>Non-Fleet Bound Premium: $1,068,258.36</a:t>
                       </a:r>
                     </a:p>
                   </a:txBody>
@@ -3840,7 +3840,7 @@
                         <a:rPr sz="900">
                           <a:latin typeface="Segoe UI"/>
                         </a:rPr>
-                        <a:t>Non-Fleet Book %: 37.7%</a:t>
+                        <a:t>Non-Fleet Book %: 38.5%</a:t>
                       </a:r>
                     </a:p>
                   </a:txBody>
@@ -4425,7 +4425,7 @@
                           </a:solidFill>
                           <a:latin typeface="Segoe UI"/>
                         </a:rPr>
-                        <a:t>196</a:t>
+                        <a:t>206</a:t>
                       </a:r>
                     </a:p>
                   </a:txBody>
@@ -4661,7 +4661,7 @@
                         <a:rPr sz="800">
                           <a:latin typeface="Segoe UI"/>
                         </a:rPr>
-                        <a:t>19.8%</a:t>
+                        <a:t>20.1%</a:t>
                       </a:r>
                     </a:p>
                   </a:txBody>
@@ -4704,7 +4704,7 @@
                           </a:solidFill>
                           <a:latin typeface="Segoe UI"/>
                         </a:rPr>
-                        <a:t>9.7%</a:t>
+                        <a:t>10.2%</a:t>
                       </a:r>
                     </a:p>
                   </a:txBody>
@@ -4744,7 +4744,7 @@
                         <a:rPr sz="800">
                           <a:latin typeface="Segoe UI"/>
                         </a:rPr>
-                        <a:t>23.9%</a:t>
+                        <a:t>23.3%</a:t>
                       </a:r>
                     </a:p>
                   </a:txBody>
@@ -4940,7 +4940,7 @@
                         <a:rPr sz="800">
                           <a:latin typeface="Segoe UI"/>
                         </a:rPr>
-                        <a:t>73</a:t>
+                        <a:t>74</a:t>
                       </a:r>
                     </a:p>
                   </a:txBody>
@@ -4980,7 +4980,7 @@
                           </a:solidFill>
                           <a:latin typeface="Segoe UI"/>
                         </a:rPr>
-                        <a:t>19</a:t>
+                        <a:t>21</a:t>
                       </a:r>
                     </a:p>
                   </a:txBody>
@@ -5017,7 +5017,7 @@
                         <a:rPr sz="800">
                           <a:latin typeface="Segoe UI"/>
                         </a:rPr>
-                        <a:t>84</a:t>
+                        <a:t>82</a:t>
                       </a:r>
                     </a:p>
                   </a:txBody>
@@ -5259,7 +5259,7 @@
                           </a:solidFill>
                           <a:latin typeface="Segoe UI"/>
                         </a:rPr>
-                        <a:t>$584.8K</a:t>
+                        <a:t>$645.6K</a:t>
                       </a:r>
                     </a:p>
                   </a:txBody>

--- a/generated/Tier 1 Broker Scorecards/Jagdeep Singh Insurance Agency, Inc_Broker_Scorecard.pptx
+++ b/generated/Tier 1 Broker Scorecards/Jagdeep Singh Insurance Agency, Inc_Broker_Scorecard.pptx
@@ -3394,7 +3394,7 @@
                         <a:rPr sz="900">
                           <a:latin typeface="Segoe UI"/>
                         </a:rPr>
-                        <a:t>Tier 1  |  6.93% / 15.00%</a:t>
+                        <a:t>Tier 1  |  6.71% / 15.00%</a:t>
                       </a:r>
                     </a:p>
                   </a:txBody>
@@ -3653,7 +3653,7 @@
                         <a:rPr sz="900">
                           <a:latin typeface="Segoe UI"/>
                         </a:rPr>
-                        <a:t>Fleet Subs: 210  |  Binds: 21</a:t>
+                        <a:t>Fleet Subs: 212  |  Binds: 19</a:t>
                       </a:r>
                     </a:p>
                   </a:txBody>
@@ -3690,7 +3690,7 @@
                         <a:rPr sz="900">
                           <a:latin typeface="Segoe UI"/>
                         </a:rPr>
-                        <a:t>Fleet Bound Premium: $1,708,274.49</a:t>
+                        <a:t>Fleet Bound Premium: $1,615,323.15</a:t>
                       </a:r>
                     </a:p>
                   </a:txBody>
@@ -3727,7 +3727,7 @@
                         <a:rPr sz="900">
                           <a:latin typeface="Segoe UI"/>
                         </a:rPr>
-                        <a:t>Fleet Book %: 61.5%</a:t>
+                        <a:t>Fleet Book %: 58.2%</a:t>
                       </a:r>
                     </a:p>
                   </a:txBody>
@@ -3766,7 +3766,7 @@
                         <a:rPr sz="900">
                           <a:latin typeface="Segoe UI"/>
                         </a:rPr>
-                        <a:t>Non-Fleet Subs: 1045  |  Binds: 66</a:t>
+                        <a:t>Non-Fleet Subs: 1055  |  Binds: 66</a:t>
                       </a:r>
                     </a:p>
                   </a:txBody>
@@ -3803,7 +3803,7 @@
                         <a:rPr sz="900">
                           <a:latin typeface="Segoe UI"/>
                         </a:rPr>
-                        <a:t>Non-Fleet Bound Premium: $1,068,258.36</a:t>
+                        <a:t>Non-Fleet Bound Premium: $1,161,209.70</a:t>
                       </a:r>
                     </a:p>
                   </a:txBody>
@@ -3840,7 +3840,7 @@
                         <a:rPr sz="900">
                           <a:latin typeface="Segoe UI"/>
                         </a:rPr>
-                        <a:t>Non-Fleet Book %: 38.5%</a:t>
+                        <a:t>Non-Fleet Book %: 41.8%</a:t>
                       </a:r>
                     </a:p>
                   </a:txBody>
@@ -4425,7 +4425,7 @@
                           </a:solidFill>
                           <a:latin typeface="Segoe UI"/>
                         </a:rPr>
-                        <a:t>206</a:t>
+                        <a:t>218</a:t>
                       </a:r>
                     </a:p>
                   </a:txBody>
@@ -4704,7 +4704,7 @@
                           </a:solidFill>
                           <a:latin typeface="Segoe UI"/>
                         </a:rPr>
-                        <a:t>10.2%</a:t>
+                        <a:t>8.7%</a:t>
                       </a:r>
                     </a:p>
                   </a:txBody>
@@ -4744,7 +4744,7 @@
                         <a:rPr sz="800">
                           <a:latin typeface="Segoe UI"/>
                         </a:rPr>
-                        <a:t>23.3%</a:t>
+                        <a:t>23.9%</a:t>
                       </a:r>
                     </a:p>
                   </a:txBody>
@@ -4980,7 +4980,7 @@
                           </a:solidFill>
                           <a:latin typeface="Segoe UI"/>
                         </a:rPr>
-                        <a:t>21</a:t>
+                        <a:t>19</a:t>
                       </a:r>
                     </a:p>
                   </a:txBody>
@@ -5017,7 +5017,7 @@
                         <a:rPr sz="800">
                           <a:latin typeface="Segoe UI"/>
                         </a:rPr>
-                        <a:t>82</a:t>
+                        <a:t>84</a:t>
                       </a:r>
                     </a:p>
                   </a:txBody>

--- a/generated/Tier 1 Broker Scorecards/Jagdeep Singh Insurance Agency, Inc_Broker_Scorecard.pptx
+++ b/generated/Tier 1 Broker Scorecards/Jagdeep Singh Insurance Agency, Inc_Broker_Scorecard.pptx
@@ -3394,7 +3394,7 @@
                         <a:rPr sz="900">
                           <a:latin typeface="Segoe UI"/>
                         </a:rPr>
-                        <a:t>Tier 1  |  6.71% / 15.00%</a:t>
+                        <a:t>Tier 1  |  6.46% / 15.00%</a:t>
                       </a:r>
                     </a:p>
                   </a:txBody>
@@ -3653,7 +3653,7 @@
                         <a:rPr sz="900">
                           <a:latin typeface="Segoe UI"/>
                         </a:rPr>
-                        <a:t>Fleet Subs: 212  |  Binds: 19</a:t>
+                        <a:t>Fleet Subs: 214  |  Binds: 17</a:t>
                       </a:r>
                     </a:p>
                   </a:txBody>
@@ -3690,7 +3690,7 @@
                         <a:rPr sz="900">
                           <a:latin typeface="Segoe UI"/>
                         </a:rPr>
-                        <a:t>Fleet Bound Premium: $1,615,323.15</a:t>
+                        <a:t>Fleet Bound Premium: $1,543,431.09</a:t>
                       </a:r>
                     </a:p>
                   </a:txBody>
@@ -3727,7 +3727,7 @@
                         <a:rPr sz="900">
                           <a:latin typeface="Segoe UI"/>
                         </a:rPr>
-                        <a:t>Fleet Book %: 58.2%</a:t>
+                        <a:t>Fleet Book %: 55.6%</a:t>
                       </a:r>
                     </a:p>
                   </a:txBody>
@@ -3766,7 +3766,7 @@
                         <a:rPr sz="900">
                           <a:latin typeface="Segoe UI"/>
                         </a:rPr>
-                        <a:t>Non-Fleet Subs: 1055  |  Binds: 66</a:t>
+                        <a:t>Non-Fleet Subs: 1055  |  Binds: 65</a:t>
                       </a:r>
                     </a:p>
                   </a:txBody>
@@ -3803,7 +3803,7 @@
                         <a:rPr sz="900">
                           <a:latin typeface="Segoe UI"/>
                         </a:rPr>
-                        <a:t>Non-Fleet Bound Premium: $1,161,209.70</a:t>
+                        <a:t>Non-Fleet Bound Premium: $1,233,101.76</a:t>
                       </a:r>
                     </a:p>
                   </a:txBody>
@@ -3840,7 +3840,7 @@
                         <a:rPr sz="900">
                           <a:latin typeface="Segoe UI"/>
                         </a:rPr>
-                        <a:t>Non-Fleet Book %: 41.8%</a:t>
+                        <a:t>Non-Fleet Book %: 44.4%</a:t>
                       </a:r>
                     </a:p>
                   </a:txBody>
@@ -4311,7 +4311,7 @@
                         <a:rPr sz="800">
                           <a:latin typeface="Segoe UI"/>
                         </a:rPr>
-                        <a:t>337</a:t>
+                        <a:t>336</a:t>
                       </a:r>
                     </a:p>
                   </a:txBody>
@@ -4346,6 +4346,9 @@
                       <a:pPr algn="ctr"/>
                       <a:r>
                         <a:rPr sz="800">
+                          <a:solidFill>
+                            <a:srgbClr val="059669"/>
+                          </a:solidFill>
                           <a:latin typeface="Segoe UI"/>
                         </a:rPr>
                         <a:t>337</a:t>
@@ -4425,7 +4428,7 @@
                           </a:solidFill>
                           <a:latin typeface="Segoe UI"/>
                         </a:rPr>
-                        <a:t>218</a:t>
+                        <a:t>223</a:t>
                       </a:r>
                     </a:p>
                   </a:txBody>
@@ -4704,7 +4707,7 @@
                           </a:solidFill>
                           <a:latin typeface="Segoe UI"/>
                         </a:rPr>
-                        <a:t>8.7%</a:t>
+                        <a:t>8.1%</a:t>
                       </a:r>
                     </a:p>
                   </a:txBody>
@@ -4980,7 +4983,7 @@
                           </a:solidFill>
                           <a:latin typeface="Segoe UI"/>
                         </a:rPr>
-                        <a:t>19</a:t>
+                        <a:t>18</a:t>
                       </a:r>
                     </a:p>
                   </a:txBody>

--- a/generated/Tier 1 Broker Scorecards/Jagdeep Singh Insurance Agency, Inc_Broker_Scorecard.pptx
+++ b/generated/Tier 1 Broker Scorecards/Jagdeep Singh Insurance Agency, Inc_Broker_Scorecard.pptx
@@ -3690,7 +3690,7 @@
                         <a:rPr sz="900">
                           <a:latin typeface="Segoe UI"/>
                         </a:rPr>
-                        <a:t>Fleet Bound Premium: $1,543,431.09</a:t>
+                        <a:t>Fleet Bound Premium: $1,544,861.87</a:t>
                       </a:r>
                     </a:p>
                   </a:txBody>
@@ -3766,7 +3766,7 @@
                         <a:rPr sz="900">
                           <a:latin typeface="Segoe UI"/>
                         </a:rPr>
-                        <a:t>Non-Fleet Subs: 1055  |  Binds: 65</a:t>
+                        <a:t>Non-Fleet Subs: 1056  |  Binds: 65</a:t>
                       </a:r>
                     </a:p>
                   </a:txBody>
@@ -3803,7 +3803,7 @@
                         <a:rPr sz="900">
                           <a:latin typeface="Segoe UI"/>
                         </a:rPr>
-                        <a:t>Non-Fleet Bound Premium: $1,233,101.76</a:t>
+                        <a:t>Non-Fleet Bound Premium: $1,231,670.98</a:t>
                       </a:r>
                     </a:p>
                   </a:txBody>
@@ -4428,7 +4428,7 @@
                           </a:solidFill>
                           <a:latin typeface="Segoe UI"/>
                         </a:rPr>
-                        <a:t>223</a:t>
+                        <a:t>224</a:t>
                       </a:r>
                     </a:p>
                   </a:txBody>
@@ -4707,7 +4707,7 @@
                           </a:solidFill>
                           <a:latin typeface="Segoe UI"/>
                         </a:rPr>
-                        <a:t>8.1%</a:t>
+                        <a:t>8.0%</a:t>
                       </a:r>
                     </a:p>
                   </a:txBody>
@@ -4747,7 +4747,7 @@
                         <a:rPr sz="800">
                           <a:latin typeface="Segoe UI"/>
                         </a:rPr>
-                        <a:t>23.9%</a:t>
+                        <a:t>23.3%</a:t>
                       </a:r>
                     </a:p>
                   </a:txBody>
@@ -5020,7 +5020,7 @@
                         <a:rPr sz="800">
                           <a:latin typeface="Segoe UI"/>
                         </a:rPr>
-                        <a:t>84</a:t>
+                        <a:t>82</a:t>
                       </a:r>
                     </a:p>
                   </a:txBody>

--- a/generated/Tier 1 Broker Scorecards/Jagdeep Singh Insurance Agency, Inc_Broker_Scorecard.pptx
+++ b/generated/Tier 1 Broker Scorecards/Jagdeep Singh Insurance Agency, Inc_Broker_Scorecard.pptx
@@ -3394,7 +3394,7 @@
                         <a:rPr sz="900">
                           <a:latin typeface="Segoe UI"/>
                         </a:rPr>
-                        <a:t>Tier 1  |  6.46% / 15.00%</a:t>
+                        <a:t>Tier 1  |  6.45% / 15.00%</a:t>
                       </a:r>
                     </a:p>
                   </a:txBody>
@@ -3690,7 +3690,7 @@
                         <a:rPr sz="900">
                           <a:latin typeface="Segoe UI"/>
                         </a:rPr>
-                        <a:t>Fleet Bound Premium: $1,544,861.87</a:t>
+                        <a:t>Fleet Bound Premium: $1,544,213.99</a:t>
                       </a:r>
                     </a:p>
                   </a:txBody>
@@ -3766,7 +3766,7 @@
                         <a:rPr sz="900">
                           <a:latin typeface="Segoe UI"/>
                         </a:rPr>
-                        <a:t>Non-Fleet Subs: 1056  |  Binds: 65</a:t>
+                        <a:t>Non-Fleet Subs: 1057  |  Binds: 65</a:t>
                       </a:r>
                     </a:p>
                   </a:txBody>
@@ -3803,7 +3803,7 @@
                         <a:rPr sz="900">
                           <a:latin typeface="Segoe UI"/>
                         </a:rPr>
-                        <a:t>Non-Fleet Bound Premium: $1,231,670.98</a:t>
+                        <a:t>Non-Fleet Bound Premium: $1,232,318.86</a:t>
                       </a:r>
                     </a:p>
                   </a:txBody>
@@ -4428,7 +4428,7 @@
                           </a:solidFill>
                           <a:latin typeface="Segoe UI"/>
                         </a:rPr>
-                        <a:t>224</a:t>
+                        <a:t>225</a:t>
                       </a:r>
                     </a:p>
                   </a:txBody>
@@ -4664,7 +4664,7 @@
                         <a:rPr sz="800">
                           <a:latin typeface="Segoe UI"/>
                         </a:rPr>
-                        <a:t>20.1%</a:t>
+                        <a:t>20.4%</a:t>
                       </a:r>
                     </a:p>
                   </a:txBody>
@@ -4747,7 +4747,7 @@
                         <a:rPr sz="800">
                           <a:latin typeface="Segoe UI"/>
                         </a:rPr>
-                        <a:t>23.3%</a:t>
+                        <a:t>23.9%</a:t>
                       </a:r>
                     </a:p>
                   </a:txBody>
@@ -4943,7 +4943,7 @@
                         <a:rPr sz="800">
                           <a:latin typeface="Segoe UI"/>
                         </a:rPr>
-                        <a:t>74</a:t>
+                        <a:t>75</a:t>
                       </a:r>
                     </a:p>
                   </a:txBody>
@@ -5020,7 +5020,7 @@
                         <a:rPr sz="800">
                           <a:latin typeface="Segoe UI"/>
                         </a:rPr>
-                        <a:t>82</a:t>
+                        <a:t>84</a:t>
                       </a:r>
                     </a:p>
                   </a:txBody>

--- a/generated/Tier 1 Broker Scorecards/Jagdeep Singh Insurance Agency, Inc_Broker_Scorecard.pptx
+++ b/generated/Tier 1 Broker Scorecards/Jagdeep Singh Insurance Agency, Inc_Broker_Scorecard.pptx
@@ -3690,7 +3690,7 @@
                         <a:rPr sz="900">
                           <a:latin typeface="Segoe UI"/>
                         </a:rPr>
-                        <a:t>Fleet Bound Premium: $1,544,213.99</a:t>
+                        <a:t>Fleet Bound Premium: $1,544,939.75</a:t>
                       </a:r>
                     </a:p>
                   </a:txBody>
@@ -3766,7 +3766,7 @@
                         <a:rPr sz="900">
                           <a:latin typeface="Segoe UI"/>
                         </a:rPr>
-                        <a:t>Non-Fleet Subs: 1057  |  Binds: 65</a:t>
+                        <a:t>Non-Fleet Subs: 1058  |  Binds: 65</a:t>
                       </a:r>
                     </a:p>
                   </a:txBody>
@@ -3803,7 +3803,7 @@
                         <a:rPr sz="900">
                           <a:latin typeface="Segoe UI"/>
                         </a:rPr>
-                        <a:t>Non-Fleet Bound Premium: $1,232,318.86</a:t>
+                        <a:t>Non-Fleet Bound Premium: $1,231,593.10</a:t>
                       </a:r>
                     </a:p>
                   </a:txBody>
@@ -4428,7 +4428,7 @@
                           </a:solidFill>
                           <a:latin typeface="Segoe UI"/>
                         </a:rPr>
-                        <a:t>225</a:t>
+                        <a:t>226</a:t>
                       </a:r>
                     </a:p>
                   </a:txBody>
@@ -4664,7 +4664,7 @@
                         <a:rPr sz="800">
                           <a:latin typeface="Segoe UI"/>
                         </a:rPr>
-                        <a:t>20.4%</a:t>
+                        <a:t>20.1%</a:t>
                       </a:r>
                     </a:p>
                   </a:txBody>
@@ -4943,7 +4943,7 @@
                         <a:rPr sz="800">
                           <a:latin typeface="Segoe UI"/>
                         </a:rPr>
-                        <a:t>75</a:t>
+                        <a:t>74</a:t>
                       </a:r>
                     </a:p>
                   </a:txBody>

--- a/generated/Tier 1 Broker Scorecards/Jagdeep Singh Insurance Agency, Inc_Broker_Scorecard.pptx
+++ b/generated/Tier 1 Broker Scorecards/Jagdeep Singh Insurance Agency, Inc_Broker_Scorecard.pptx
@@ -3357,7 +3357,7 @@
                         <a:rPr sz="800">
                           <a:latin typeface="Segoe UI"/>
                         </a:rPr>
-                        <a:t>$12,058,763.07 / $10,785,724.36 / $2,776,532.85</a:t>
+                        <a:t>$12,058,763.07 / $10,780,372.25 / $2,771,180.74</a:t>
                       </a:r>
                     </a:p>
                   </a:txBody>
@@ -3394,7 +3394,7 @@
                         <a:rPr sz="900">
                           <a:latin typeface="Segoe UI"/>
                         </a:rPr>
-                        <a:t>Tier 1  |  6.45% / 15.00%</a:t>
+                        <a:t>Tier 1  |  6.57% / 15.00%</a:t>
                       </a:r>
                     </a:p>
                   </a:txBody>
@@ -3653,7 +3653,7 @@
                         <a:rPr sz="900">
                           <a:latin typeface="Segoe UI"/>
                         </a:rPr>
-                        <a:t>Fleet Subs: 214  |  Binds: 17</a:t>
+                        <a:t>Fleet Subs: 216  |  Binds: 20</a:t>
                       </a:r>
                     </a:p>
                   </a:txBody>
@@ -3690,7 +3690,7 @@
                         <a:rPr sz="900">
                           <a:latin typeface="Segoe UI"/>
                         </a:rPr>
-                        <a:t>Fleet Bound Premium: $1,544,939.75</a:t>
+                        <a:t>Fleet Bound Premium: $1,667,275.37</a:t>
                       </a:r>
                     </a:p>
                   </a:txBody>
@@ -3727,7 +3727,7 @@
                         <a:rPr sz="900">
                           <a:latin typeface="Segoe UI"/>
                         </a:rPr>
-                        <a:t>Fleet Book %: 55.6%</a:t>
+                        <a:t>Fleet Book %: 60.2%</a:t>
                       </a:r>
                     </a:p>
                   </a:txBody>
@@ -3766,7 +3766,7 @@
                         <a:rPr sz="900">
                           <a:latin typeface="Segoe UI"/>
                         </a:rPr>
-                        <a:t>Non-Fleet Subs: 1058  |  Binds: 65</a:t>
+                        <a:t>Non-Fleet Subs: 1063  |  Binds: 64</a:t>
                       </a:r>
                     </a:p>
                   </a:txBody>
@@ -3803,7 +3803,7 @@
                         <a:rPr sz="900">
                           <a:latin typeface="Segoe UI"/>
                         </a:rPr>
-                        <a:t>Non-Fleet Bound Premium: $1,231,593.10</a:t>
+                        <a:t>Non-Fleet Bound Premium: $1,103,905.37</a:t>
                       </a:r>
                     </a:p>
                   </a:txBody>
@@ -3840,7 +3840,7 @@
                         <a:rPr sz="900">
                           <a:latin typeface="Segoe UI"/>
                         </a:rPr>
-                        <a:t>Non-Fleet Book %: 44.4%</a:t>
+                        <a:t>Non-Fleet Book %: 39.8%</a:t>
                       </a:r>
                     </a:p>
                   </a:txBody>
@@ -4311,7 +4311,7 @@
                         <a:rPr sz="800">
                           <a:latin typeface="Segoe UI"/>
                         </a:rPr>
-                        <a:t>336</a:t>
+                        <a:t>337</a:t>
                       </a:r>
                     </a:p>
                   </a:txBody>
@@ -4346,9 +4346,6 @@
                       <a:pPr algn="ctr"/>
                       <a:r>
                         <a:rPr sz="800">
-                          <a:solidFill>
-                            <a:srgbClr val="059669"/>
-                          </a:solidFill>
                           <a:latin typeface="Segoe UI"/>
                         </a:rPr>
                         <a:t>337</a:t>
@@ -4428,7 +4425,7 @@
                           </a:solidFill>
                           <a:latin typeface="Segoe UI"/>
                         </a:rPr>
-                        <a:t>226</a:t>
+                        <a:t>235</a:t>
                       </a:r>
                     </a:p>
                   </a:txBody>
@@ -4707,7 +4704,7 @@
                           </a:solidFill>
                           <a:latin typeface="Segoe UI"/>
                         </a:rPr>
-                        <a:t>8.0%</a:t>
+                        <a:t>8.5%</a:t>
                       </a:r>
                     </a:p>
                   </a:txBody>
@@ -4747,7 +4744,7 @@
                         <a:rPr sz="800">
                           <a:latin typeface="Segoe UI"/>
                         </a:rPr>
-                        <a:t>23.9%</a:t>
+                        <a:t>24.1%</a:t>
                       </a:r>
                     </a:p>
                   </a:txBody>
@@ -4983,7 +4980,7 @@
                           </a:solidFill>
                           <a:latin typeface="Segoe UI"/>
                         </a:rPr>
-                        <a:t>18</a:t>
+                        <a:t>20</a:t>
                       </a:r>
                     </a:p>
                   </a:txBody>
@@ -5020,7 +5017,7 @@
                         <a:rPr sz="800">
                           <a:latin typeface="Segoe UI"/>
                         </a:rPr>
-                        <a:t>84</a:t>
+                        <a:t>85</a:t>
                       </a:r>
                     </a:p>
                   </a:txBody>
@@ -5262,7 +5259,7 @@
                           </a:solidFill>
                           <a:latin typeface="Segoe UI"/>
                         </a:rPr>
-                        <a:t>$645.6K</a:t>
+                        <a:t>$640.3K</a:t>
                       </a:r>
                     </a:p>
                   </a:txBody>

--- a/generated/Tier 1 Broker Scorecards/Jagdeep Singh Insurance Agency, Inc_Broker_Scorecard.pptx
+++ b/generated/Tier 1 Broker Scorecards/Jagdeep Singh Insurance Agency, Inc_Broker_Scorecard.pptx
@@ -3357,7 +3357,7 @@
                         <a:rPr sz="800">
                           <a:latin typeface="Segoe UI"/>
                         </a:rPr>
-                        <a:t>$12,058,763.07 / $10,780,372.25 / $2,771,180.74</a:t>
+                        <a:t>$12,058,763.07 / $10,808,636.46 / $2,799,444.95</a:t>
                       </a:r>
                     </a:p>
                   </a:txBody>
@@ -3394,7 +3394,7 @@
                         <a:rPr sz="900">
                           <a:latin typeface="Segoe UI"/>
                         </a:rPr>
-                        <a:t>Tier 1  |  6.57% / 15.00%</a:t>
+                        <a:t>Tier 1  |  6.76% / 15.00%</a:t>
                       </a:r>
                     </a:p>
                   </a:txBody>
@@ -3431,7 +3431,7 @@
                         <a:rPr sz="900">
                           <a:latin typeface="Segoe UI"/>
                         </a:rPr>
-                        <a:t>$16,882,268.30  (16.4% achieved)</a:t>
+                        <a:t>$16,882,268.30  (16.6% achieved)</a:t>
                       </a:r>
                     </a:p>
                   </a:txBody>
@@ -3653,7 +3653,7 @@
                         <a:rPr sz="900">
                           <a:latin typeface="Segoe UI"/>
                         </a:rPr>
-                        <a:t>Fleet Subs: 216  |  Binds: 20</a:t>
+                        <a:t>Fleet Subs: 217  |  Binds: 21</a:t>
                       </a:r>
                     </a:p>
                   </a:txBody>
@@ -3690,7 +3690,7 @@
                         <a:rPr sz="900">
                           <a:latin typeface="Segoe UI"/>
                         </a:rPr>
-                        <a:t>Fleet Bound Premium: $1,667,275.37</a:t>
+                        <a:t>Fleet Bound Premium: $1,783,418.39</a:t>
                       </a:r>
                     </a:p>
                   </a:txBody>
@@ -3727,7 +3727,7 @@
                         <a:rPr sz="900">
                           <a:latin typeface="Segoe UI"/>
                         </a:rPr>
-                        <a:t>Fleet Book %: 60.2%</a:t>
+                        <a:t>Fleet Book %: 63.7%</a:t>
                       </a:r>
                     </a:p>
                   </a:txBody>
@@ -3766,7 +3766,7 @@
                         <a:rPr sz="900">
                           <a:latin typeface="Segoe UI"/>
                         </a:rPr>
-                        <a:t>Non-Fleet Subs: 1063  |  Binds: 64</a:t>
+                        <a:t>Non-Fleet Subs: 1070  |  Binds: 66</a:t>
                       </a:r>
                     </a:p>
                   </a:txBody>
@@ -3803,7 +3803,7 @@
                         <a:rPr sz="900">
                           <a:latin typeface="Segoe UI"/>
                         </a:rPr>
-                        <a:t>Non-Fleet Bound Premium: $1,103,905.37</a:t>
+                        <a:t>Non-Fleet Bound Premium: $1,016,026.56</a:t>
                       </a:r>
                     </a:p>
                   </a:txBody>
@@ -3840,7 +3840,7 @@
                         <a:rPr sz="900">
                           <a:latin typeface="Segoe UI"/>
                         </a:rPr>
-                        <a:t>Non-Fleet Book %: 39.8%</a:t>
+                        <a:t>Non-Fleet Book %: 36.3%</a:t>
                       </a:r>
                     </a:p>
                   </a:txBody>
@@ -4311,7 +4311,7 @@
                         <a:rPr sz="800">
                           <a:latin typeface="Segoe UI"/>
                         </a:rPr>
-                        <a:t>337</a:t>
+                        <a:t>336</a:t>
                       </a:r>
                     </a:p>
                   </a:txBody>
@@ -4346,6 +4346,9 @@
                       <a:pPr algn="ctr"/>
                       <a:r>
                         <a:rPr sz="800">
+                          <a:solidFill>
+                            <a:srgbClr val="059669"/>
+                          </a:solidFill>
                           <a:latin typeface="Segoe UI"/>
                         </a:rPr>
                         <a:t>337</a:t>
@@ -4425,7 +4428,7 @@
                           </a:solidFill>
                           <a:latin typeface="Segoe UI"/>
                         </a:rPr>
-                        <a:t>235</a:t>
+                        <a:t>243</a:t>
                       </a:r>
                     </a:p>
                   </a:txBody>
@@ -4661,7 +4664,7 @@
                         <a:rPr sz="800">
                           <a:latin typeface="Segoe UI"/>
                         </a:rPr>
-                        <a:t>20.1%</a:t>
+                        <a:t>20.4%</a:t>
                       </a:r>
                     </a:p>
                   </a:txBody>
@@ -4704,7 +4707,7 @@
                           </a:solidFill>
                           <a:latin typeface="Segoe UI"/>
                         </a:rPr>
-                        <a:t>8.5%</a:t>
+                        <a:t>9.5%</a:t>
                       </a:r>
                     </a:p>
                   </a:txBody>
@@ -4744,7 +4747,7 @@
                         <a:rPr sz="800">
                           <a:latin typeface="Segoe UI"/>
                         </a:rPr>
-                        <a:t>24.1%</a:t>
+                        <a:t>23.3%</a:t>
                       </a:r>
                     </a:p>
                   </a:txBody>
@@ -4940,7 +4943,7 @@
                         <a:rPr sz="800">
                           <a:latin typeface="Segoe UI"/>
                         </a:rPr>
-                        <a:t>74</a:t>
+                        <a:t>75</a:t>
                       </a:r>
                     </a:p>
                   </a:txBody>
@@ -4980,7 +4983,7 @@
                           </a:solidFill>
                           <a:latin typeface="Segoe UI"/>
                         </a:rPr>
-                        <a:t>20</a:t>
+                        <a:t>23</a:t>
                       </a:r>
                     </a:p>
                   </a:txBody>
@@ -5017,7 +5020,7 @@
                         <a:rPr sz="800">
                           <a:latin typeface="Segoe UI"/>
                         </a:rPr>
-                        <a:t>85</a:t>
+                        <a:t>82</a:t>
                       </a:r>
                     </a:p>
                   </a:txBody>
@@ -5259,7 +5262,7 @@
                           </a:solidFill>
                           <a:latin typeface="Segoe UI"/>
                         </a:rPr>
-                        <a:t>$640.3K</a:t>
+                        <a:t>$668.6K</a:t>
                       </a:r>
                     </a:p>
                   </a:txBody>

--- a/generated/Tier 1 Broker Scorecards/Jagdeep Singh Insurance Agency, Inc_Broker_Scorecard.pptx
+++ b/generated/Tier 1 Broker Scorecards/Jagdeep Singh Insurance Agency, Inc_Broker_Scorecard.pptx
@@ -3394,7 +3394,7 @@
                         <a:rPr sz="900">
                           <a:latin typeface="Segoe UI"/>
                         </a:rPr>
-                        <a:t>Tier 1  |  6.76% / 15.00%</a:t>
+                        <a:t>Tier 1  |  6.77% / 15.00%</a:t>
                       </a:r>
                     </a:p>
                   </a:txBody>
@@ -3653,7 +3653,7 @@
                         <a:rPr sz="900">
                           <a:latin typeface="Segoe UI"/>
                         </a:rPr>
-                        <a:t>Fleet Subs: 217  |  Binds: 21</a:t>
+                        <a:t>Fleet Subs: 219  |  Binds: 21</a:t>
                       </a:r>
                     </a:p>
                   </a:txBody>
@@ -3690,7 +3690,7 @@
                         <a:rPr sz="900">
                           <a:latin typeface="Segoe UI"/>
                         </a:rPr>
-                        <a:t>Fleet Bound Premium: $1,783,418.39</a:t>
+                        <a:t>Fleet Bound Premium: $1,777,619.22</a:t>
                       </a:r>
                     </a:p>
                   </a:txBody>
@@ -3727,7 +3727,7 @@
                         <a:rPr sz="900">
                           <a:latin typeface="Segoe UI"/>
                         </a:rPr>
-                        <a:t>Fleet Book %: 63.7%</a:t>
+                        <a:t>Fleet Book %: 63.5%</a:t>
                       </a:r>
                     </a:p>
                   </a:txBody>
@@ -3766,7 +3766,7 @@
                         <a:rPr sz="900">
                           <a:latin typeface="Segoe UI"/>
                         </a:rPr>
-                        <a:t>Non-Fleet Subs: 1070  |  Binds: 66</a:t>
+                        <a:t>Non-Fleet Subs: 1081  |  Binds: 67</a:t>
                       </a:r>
                     </a:p>
                   </a:txBody>
@@ -3803,7 +3803,7 @@
                         <a:rPr sz="900">
                           <a:latin typeface="Segoe UI"/>
                         </a:rPr>
-                        <a:t>Non-Fleet Bound Premium: $1,016,026.56</a:t>
+                        <a:t>Non-Fleet Bound Premium: $1,021,825.73</a:t>
                       </a:r>
                     </a:p>
                   </a:txBody>
@@ -3840,7 +3840,7 @@
                         <a:rPr sz="900">
                           <a:latin typeface="Segoe UI"/>
                         </a:rPr>
-                        <a:t>Non-Fleet Book %: 36.3%</a:t>
+                        <a:t>Non-Fleet Book %: 36.5%</a:t>
                       </a:r>
                     </a:p>
                   </a:txBody>
@@ -4428,7 +4428,7 @@
                           </a:solidFill>
                           <a:latin typeface="Segoe UI"/>
                         </a:rPr>
-                        <a:t>243</a:t>
+                        <a:t>256</a:t>
                       </a:r>
                     </a:p>
                   </a:txBody>
@@ -4664,7 +4664,7 @@
                         <a:rPr sz="800">
                           <a:latin typeface="Segoe UI"/>
                         </a:rPr>
-                        <a:t>20.4%</a:t>
+                        <a:t>20.1%</a:t>
                       </a:r>
                     </a:p>
                   </a:txBody>
@@ -4707,7 +4707,7 @@
                           </a:solidFill>
                           <a:latin typeface="Segoe UI"/>
                         </a:rPr>
-                        <a:t>9.5%</a:t>
+                        <a:t>9.0%</a:t>
                       </a:r>
                     </a:p>
                   </a:txBody>
@@ -4747,7 +4747,7 @@
                         <a:rPr sz="800">
                           <a:latin typeface="Segoe UI"/>
                         </a:rPr>
-                        <a:t>23.3%</a:t>
+                        <a:t>23.6%</a:t>
                       </a:r>
                     </a:p>
                   </a:txBody>
@@ -4943,7 +4943,7 @@
                         <a:rPr sz="800">
                           <a:latin typeface="Segoe UI"/>
                         </a:rPr>
-                        <a:t>75</a:t>
+                        <a:t>74</a:t>
                       </a:r>
                     </a:p>
                   </a:txBody>
@@ -5020,7 +5020,7 @@
                         <a:rPr sz="800">
                           <a:latin typeface="Segoe UI"/>
                         </a:rPr>
-                        <a:t>82</a:t>
+                        <a:t>83</a:t>
                       </a:r>
                     </a:p>
                   </a:txBody>
@@ -5339,10 +5339,13 @@
                     <a:p>
                       <a:pPr algn="ctr"/>
                       <a:r>
-                        <a:rPr sz="800">
+                        <a:rPr sz="800" b="1">
+                          <a:solidFill>
+                            <a:srgbClr val="DC2626"/>
+                          </a:solidFill>
                           <a:latin typeface="Segoe UI"/>
                         </a:rPr>
-                        <a:t/>
+                        <a:t>$16.0K</a:t>
                       </a:r>
                     </a:p>
                   </a:txBody>

--- a/generated/Tier 1 Broker Scorecards/Jagdeep Singh Insurance Agency, Inc_Broker_Scorecard.pptx
+++ b/generated/Tier 1 Broker Scorecards/Jagdeep Singh Insurance Agency, Inc_Broker_Scorecard.pptx
@@ -3357,7 +3357,7 @@
                         <a:rPr sz="800">
                           <a:latin typeface="Segoe UI"/>
                         </a:rPr>
-                        <a:t>$12,058,763.07 / $10,808,636.46 / $2,799,444.95</a:t>
+                        <a:t>$12,058,763.07 / $10,824,732.53 / $2,815,541.02</a:t>
                       </a:r>
                     </a:p>
                   </a:txBody>
@@ -3394,7 +3394,7 @@
                         <a:rPr sz="900">
                           <a:latin typeface="Segoe UI"/>
                         </a:rPr>
-                        <a:t>Tier 1  |  6.77% / 15.00%</a:t>
+                        <a:t>Tier 1  |  6.85% / 15.00%</a:t>
                       </a:r>
                     </a:p>
                   </a:txBody>
@@ -3431,7 +3431,7 @@
                         <a:rPr sz="900">
                           <a:latin typeface="Segoe UI"/>
                         </a:rPr>
-                        <a:t>$16,882,268.30  (16.6% achieved)</a:t>
+                        <a:t>$16,882,268.30  (16.7% achieved)</a:t>
                       </a:r>
                     </a:p>
                   </a:txBody>
@@ -3653,7 +3653,7 @@
                         <a:rPr sz="900">
                           <a:latin typeface="Segoe UI"/>
                         </a:rPr>
-                        <a:t>Fleet Subs: 219  |  Binds: 21</a:t>
+                        <a:t>Fleet Subs: 221  |  Binds: 22</a:t>
                       </a:r>
                     </a:p>
                   </a:txBody>
@@ -3690,7 +3690,7 @@
                         <a:rPr sz="900">
                           <a:latin typeface="Segoe UI"/>
                         </a:rPr>
-                        <a:t>Fleet Bound Premium: $1,777,619.22</a:t>
+                        <a:t>Fleet Bound Premium: $1,794,190.05</a:t>
                       </a:r>
                     </a:p>
                   </a:txBody>
@@ -3727,7 +3727,7 @@
                         <a:rPr sz="900">
                           <a:latin typeface="Segoe UI"/>
                         </a:rPr>
-                        <a:t>Fleet Book %: 63.5%</a:t>
+                        <a:t>Fleet Book %: 63.7%</a:t>
                       </a:r>
                     </a:p>
                   </a:txBody>
@@ -3766,7 +3766,7 @@
                         <a:rPr sz="900">
                           <a:latin typeface="Segoe UI"/>
                         </a:rPr>
-                        <a:t>Non-Fleet Subs: 1081  |  Binds: 67</a:t>
+                        <a:t>Non-Fleet Subs: 1092  |  Binds: 68</a:t>
                       </a:r>
                     </a:p>
                   </a:txBody>
@@ -3803,7 +3803,7 @@
                         <a:rPr sz="900">
                           <a:latin typeface="Segoe UI"/>
                         </a:rPr>
-                        <a:t>Non-Fleet Bound Premium: $1,021,825.73</a:t>
+                        <a:t>Non-Fleet Bound Premium: $1,021,350.97</a:t>
                       </a:r>
                     </a:p>
                   </a:txBody>
@@ -3840,7 +3840,7 @@
                         <a:rPr sz="900">
                           <a:latin typeface="Segoe UI"/>
                         </a:rPr>
-                        <a:t>Non-Fleet Book %: 36.5%</a:t>
+                        <a:t>Non-Fleet Book %: 36.3%</a:t>
                       </a:r>
                     </a:p>
                   </a:txBody>
@@ -4428,7 +4428,7 @@
                           </a:solidFill>
                           <a:latin typeface="Segoe UI"/>
                         </a:rPr>
-                        <a:t>256</a:t>
+                        <a:t>269</a:t>
                       </a:r>
                     </a:p>
                   </a:txBody>
@@ -4707,7 +4707,7 @@
                           </a:solidFill>
                           <a:latin typeface="Segoe UI"/>
                         </a:rPr>
-                        <a:t>9.0%</a:t>
+                        <a:t>9.3%</a:t>
                       </a:r>
                     </a:p>
                   </a:txBody>
@@ -4983,7 +4983,7 @@
                           </a:solidFill>
                           <a:latin typeface="Segoe UI"/>
                         </a:rPr>
-                        <a:t>23</a:t>
+                        <a:t>25</a:t>
                       </a:r>
                     </a:p>
                   </a:txBody>
@@ -5262,7 +5262,7 @@
                           </a:solidFill>
                           <a:latin typeface="Segoe UI"/>
                         </a:rPr>
-                        <a:t>$668.6K</a:t>
+                        <a:t>$684.6K</a:t>
                       </a:r>
                     </a:p>
                   </a:txBody>

--- a/generated/Tier 1 Broker Scorecards/Jagdeep Singh Insurance Agency, Inc_Broker_Scorecard.pptx
+++ b/generated/Tier 1 Broker Scorecards/Jagdeep Singh Insurance Agency, Inc_Broker_Scorecard.pptx
@@ -3394,7 +3394,7 @@
                         <a:rPr sz="900">
                           <a:latin typeface="Segoe UI"/>
                         </a:rPr>
-                        <a:t>Tier 1  |  6.85% / 15.00%</a:t>
+                        <a:t>Tier 1  |  6.90% / 15.00%</a:t>
                       </a:r>
                     </a:p>
                   </a:txBody>
@@ -3653,7 +3653,7 @@
                         <a:rPr sz="900">
                           <a:latin typeface="Segoe UI"/>
                         </a:rPr>
-                        <a:t>Fleet Subs: 221  |  Binds: 22</a:t>
+                        <a:t>Fleet Subs: 223  |  Binds: 22</a:t>
                       </a:r>
                     </a:p>
                   </a:txBody>
@@ -3690,7 +3690,7 @@
                         <a:rPr sz="900">
                           <a:latin typeface="Segoe UI"/>
                         </a:rPr>
-                        <a:t>Fleet Bound Premium: $1,794,190.05</a:t>
+                        <a:t>Fleet Bound Premium: $1,788,804.65</a:t>
                       </a:r>
                     </a:p>
                   </a:txBody>
@@ -3727,7 +3727,7 @@
                         <a:rPr sz="900">
                           <a:latin typeface="Segoe UI"/>
                         </a:rPr>
-                        <a:t>Fleet Book %: 63.7%</a:t>
+                        <a:t>Fleet Book %: 63.5%</a:t>
                       </a:r>
                     </a:p>
                   </a:txBody>
@@ -3766,7 +3766,7 @@
                         <a:rPr sz="900">
                           <a:latin typeface="Segoe UI"/>
                         </a:rPr>
-                        <a:t>Non-Fleet Subs: 1092  |  Binds: 68</a:t>
+                        <a:t>Non-Fleet Subs: 1096  |  Binds: 69</a:t>
                       </a:r>
                     </a:p>
                   </a:txBody>
@@ -3803,7 +3803,7 @@
                         <a:rPr sz="900">
                           <a:latin typeface="Segoe UI"/>
                         </a:rPr>
-                        <a:t>Non-Fleet Bound Premium: $1,021,350.97</a:t>
+                        <a:t>Non-Fleet Bound Premium: $1,026,736.37</a:t>
                       </a:r>
                     </a:p>
                   </a:txBody>
@@ -3840,7 +3840,7 @@
                         <a:rPr sz="900">
                           <a:latin typeface="Segoe UI"/>
                         </a:rPr>
-                        <a:t>Non-Fleet Book %: 36.3%</a:t>
+                        <a:t>Non-Fleet Book %: 36.5%</a:t>
                       </a:r>
                     </a:p>
                   </a:txBody>
@@ -4428,7 +4428,7 @@
                           </a:solidFill>
                           <a:latin typeface="Segoe UI"/>
                         </a:rPr>
-                        <a:t>269</a:t>
+                        <a:t>275</a:t>
                       </a:r>
                     </a:p>
                   </a:txBody>
@@ -4664,7 +4664,7 @@
                         <a:rPr sz="800">
                           <a:latin typeface="Segoe UI"/>
                         </a:rPr>
-                        <a:t>20.1%</a:t>
+                        <a:t>20.4%</a:t>
                       </a:r>
                     </a:p>
                   </a:txBody>
@@ -4707,7 +4707,7 @@
                           </a:solidFill>
                           <a:latin typeface="Segoe UI"/>
                         </a:rPr>
-                        <a:t>9.3%</a:t>
+                        <a:t>9.1%</a:t>
                       </a:r>
                     </a:p>
                   </a:txBody>
@@ -4943,7 +4943,7 @@
                         <a:rPr sz="800">
                           <a:latin typeface="Segoe UI"/>
                         </a:rPr>
-                        <a:t>74</a:t>
+                        <a:t>75</a:t>
                       </a:r>
                     </a:p>
                   </a:txBody>

--- a/generated/Tier 1 Broker Scorecards/Jagdeep Singh Insurance Agency, Inc_Broker_Scorecard.pptx
+++ b/generated/Tier 1 Broker Scorecards/Jagdeep Singh Insurance Agency, Inc_Broker_Scorecard.pptx
@@ -3357,7 +3357,7 @@
                         <a:rPr sz="800">
                           <a:latin typeface="Segoe UI"/>
                         </a:rPr>
-                        <a:t>$12,058,763.07 / $10,824,732.53 / $2,815,541.02</a:t>
+                        <a:t>$12,058,763.07 / $8,255,357.26 / $2,831,542.05</a:t>
                       </a:r>
                     </a:p>
                   </a:txBody>
@@ -3394,7 +3394,7 @@
                         <a:rPr sz="900">
                           <a:latin typeface="Segoe UI"/>
                         </a:rPr>
-                        <a:t>Tier 1  |  6.90% / 15.00%</a:t>
+                        <a:t>Tier 1  |  6.89% / 15.00%</a:t>
                       </a:r>
                     </a:p>
                   </a:txBody>
@@ -3431,7 +3431,7 @@
                         <a:rPr sz="900">
                           <a:latin typeface="Segoe UI"/>
                         </a:rPr>
-                        <a:t>$16,882,268.30  (16.7% achieved)</a:t>
+                        <a:t>$16,882,268.30  (16.8% achieved)</a:t>
                       </a:r>
                     </a:p>
                   </a:txBody>
@@ -3690,7 +3690,7 @@
                         <a:rPr sz="900">
                           <a:latin typeface="Segoe UI"/>
                         </a:rPr>
-                        <a:t>Fleet Bound Premium: $1,788,804.65</a:t>
+                        <a:t>Fleet Bound Premium: $1,799,452.58</a:t>
                       </a:r>
                     </a:p>
                   </a:txBody>
@@ -3727,7 +3727,7 @@
                         <a:rPr sz="900">
                           <a:latin typeface="Segoe UI"/>
                         </a:rPr>
-                        <a:t>Fleet Book %: 63.5%</a:t>
+                        <a:t>Fleet Book %: 63.6%</a:t>
                       </a:r>
                     </a:p>
                   </a:txBody>
@@ -3766,7 +3766,7 @@
                         <a:rPr sz="900">
                           <a:latin typeface="Segoe UI"/>
                         </a:rPr>
-                        <a:t>Non-Fleet Subs: 1096  |  Binds: 69</a:t>
+                        <a:t>Non-Fleet Subs: 1098  |  Binds: 69</a:t>
                       </a:r>
                     </a:p>
                   </a:txBody>
@@ -3803,7 +3803,7 @@
                         <a:rPr sz="900">
                           <a:latin typeface="Segoe UI"/>
                         </a:rPr>
-                        <a:t>Non-Fleet Bound Premium: $1,026,736.37</a:t>
+                        <a:t>Non-Fleet Bound Premium: $1,032,089.47</a:t>
                       </a:r>
                     </a:p>
                   </a:txBody>
@@ -3840,7 +3840,7 @@
                         <a:rPr sz="900">
                           <a:latin typeface="Segoe UI"/>
                         </a:rPr>
-                        <a:t>Non-Fleet Book %: 36.5%</a:t>
+                        <a:t>Non-Fleet Book %: 36.4%</a:t>
                       </a:r>
                     </a:p>
                   </a:txBody>
@@ -4311,7 +4311,7 @@
                         <a:rPr sz="800">
                           <a:latin typeface="Segoe UI"/>
                         </a:rPr>
-                        <a:t>336</a:t>
+                        <a:t>337</a:t>
                       </a:r>
                     </a:p>
                   </a:txBody>
@@ -4346,9 +4346,6 @@
                       <a:pPr algn="ctr"/>
                       <a:r>
                         <a:rPr sz="800">
-                          <a:solidFill>
-                            <a:srgbClr val="059669"/>
-                          </a:solidFill>
                           <a:latin typeface="Segoe UI"/>
                         </a:rPr>
                         <a:t>337</a:t>
@@ -4428,7 +4425,7 @@
                           </a:solidFill>
                           <a:latin typeface="Segoe UI"/>
                         </a:rPr>
-                        <a:t>275</a:t>
+                        <a:t>277</a:t>
                       </a:r>
                     </a:p>
                   </a:txBody>
@@ -4500,9 +4497,12 @@
                       <a:pPr algn="ctr"/>
                       <a:r>
                         <a:rPr sz="800">
+                          <a:solidFill>
+                            <a:srgbClr val="DC2626"/>
+                          </a:solidFill>
                           <a:latin typeface="Segoe UI"/>
                         </a:rPr>
-                        <a:t/>
+                        <a:t>2</a:t>
                       </a:r>
                     </a:p>
                   </a:txBody>
@@ -4664,7 +4664,7 @@
                         <a:rPr sz="800">
                           <a:latin typeface="Segoe UI"/>
                         </a:rPr>
-                        <a:t>20.4%</a:t>
+                        <a:t>20.1%</a:t>
                       </a:r>
                     </a:p>
                   </a:txBody>
@@ -4707,7 +4707,7 @@
                           </a:solidFill>
                           <a:latin typeface="Segoe UI"/>
                         </a:rPr>
-                        <a:t>9.1%</a:t>
+                        <a:t>9.0%</a:t>
                       </a:r>
                     </a:p>
                   </a:txBody>
@@ -4747,7 +4747,7 @@
                         <a:rPr sz="800">
                           <a:latin typeface="Segoe UI"/>
                         </a:rPr>
-                        <a:t>23.6%</a:t>
+                        <a:t>23.9%</a:t>
                       </a:r>
                     </a:p>
                   </a:txBody>
@@ -4943,7 +4943,7 @@
                         <a:rPr sz="800">
                           <a:latin typeface="Segoe UI"/>
                         </a:rPr>
-                        <a:t>75</a:t>
+                        <a:t>74</a:t>
                       </a:r>
                     </a:p>
                   </a:txBody>
@@ -5020,7 +5020,7 @@
                         <a:rPr sz="800">
                           <a:latin typeface="Segoe UI"/>
                         </a:rPr>
-                        <a:t>83</a:t>
+                        <a:t>84</a:t>
                       </a:r>
                     </a:p>
                   </a:txBody>
